--- a/presentations/06_events_interventions.pptx
+++ b/presentations/06_events_interventions.pptx
@@ -2209,7 +2209,7 @@
             <a:r>
               <a:rPr lang="en-US" sz="1200" i="1" dirty="0">
                 <a:solidFill>
-                  <a:srgbClr val="5A7682"/>
+                  <a:srgbClr val="8FAEB8"/>
                 </a:solidFill>
                 <a:latin typeface="Calibri" pitchFamily="34" charset="0"/>
                 <a:ea typeface="Calibri" pitchFamily="34" charset="-122"/>
@@ -2364,7 +2364,7 @@
                 <a:ea typeface="Calibri" pitchFamily="34" charset="-122"/>
                 <a:cs typeface="Calibri" pitchFamily="34" charset="-120"/>
               </a:rPr>
-              <a:t>Two of the nine ABC-01 adverse events had not resolved when the data was collected. Their end date is blank — and it must stay blank.</a:t>
+              <a:t>Two of the ten ABC-01 adverse events had not resolved when the data was collected. Their end date is blank — and it must stay blank.</a:t>
             </a:r>
             <a:endParaRPr lang="en-US" sz="1400" dirty="0"/>
           </a:p>
